--- a/public/fun/cards/finance/명함_금융보험부동산_27_브론즈.pptx
+++ b/public/fun/cards/finance/명함_금융보험부동산_27_브론즈.pptx
@@ -3099,14 +3099,101 @@
       <p:grpSpPr/>
       <p:sp>
         <p:nvSpPr>
-          <p:cNvPr id="2" name="텍스트"/>
+          <p:cNvPr id="2" name="Rectangle 1"/>
+          <p:cNvSpPr/>
+          <p:nvPr/>
+        </p:nvSpPr>
+        <p:spPr>
+          <a:xfrm>
+            <a:off x="252000" y="266400"/>
+            <a:ext cx="230400" cy="21600"/>
+          </a:xfrm>
+          <a:prstGeom prst="rect">
+            <a:avLst/>
+          </a:prstGeom>
+          <a:solidFill>
+            <a:srgbClr val="A27944"/>
+          </a:solidFill>
+          <a:ln>
+            <a:noFill/>
+          </a:ln>
+        </p:spPr>
+        <p:txBody>
+          <a:bodyPr rtlCol="0" anchor="ctr"/>
+          <a:lstStyle/>
+          <a:p>
+            <a:pPr algn="ctr"/>
+          </a:p>
+        </p:txBody>
+      </p:sp>
+      <p:sp>
+        <p:nvSpPr>
+          <p:cNvPr id="3" name="Oval 2"/>
+          <p:cNvSpPr/>
+          <p:nvPr/>
+        </p:nvSpPr>
+        <p:spPr>
+          <a:xfrm>
+            <a:off x="2736000" y="237600"/>
+            <a:ext cx="216000" cy="216000"/>
+          </a:xfrm>
+          <a:prstGeom prst="ellipse">
+            <a:avLst/>
+          </a:prstGeom>
+          <a:noFill/>
+          <a:ln w="5040">
+            <a:solidFill>
+              <a:srgbClr val="A27944"/>
+            </a:solidFill>
+          </a:ln>
+        </p:spPr>
+        <p:txBody>
+          <a:bodyPr rtlCol="0" anchor="ctr"/>
+          <a:lstStyle/>
+          <a:p>
+            <a:pPr algn="ctr"/>
+          </a:p>
+        </p:txBody>
+      </p:sp>
+      <p:sp>
+        <p:nvSpPr>
+          <p:cNvPr id="4" name="Oval 3"/>
+          <p:cNvSpPr/>
+          <p:nvPr/>
+        </p:nvSpPr>
+        <p:spPr>
+          <a:xfrm>
+            <a:off x="2826000" y="327600"/>
+            <a:ext cx="36000" cy="36000"/>
+          </a:xfrm>
+          <a:prstGeom prst="ellipse">
+            <a:avLst/>
+          </a:prstGeom>
+          <a:solidFill>
+            <a:srgbClr val="4F8796"/>
+          </a:solidFill>
+          <a:ln>
+            <a:noFill/>
+          </a:ln>
+        </p:spPr>
+        <p:txBody>
+          <a:bodyPr rtlCol="0" anchor="ctr"/>
+          <a:lstStyle/>
+          <a:p>
+            <a:pPr algn="ctr"/>
+          </a:p>
+        </p:txBody>
+      </p:sp>
+      <p:sp>
+        <p:nvSpPr>
+          <p:cNvPr id="5" name="텍스트"/>
           <p:cNvSpPr txBox="1"/>
           <p:nvPr/>
         </p:nvSpPr>
         <p:spPr>
           <a:xfrm>
-            <a:off x="252000" y="72000"/>
-            <a:ext cx="1296000" cy="1008000"/>
+            <a:off x="252000" y="403200"/>
+            <a:ext cx="1512000" cy="123826"/>
           </a:xfrm>
           <a:prstGeom prst="rect">
             <a:avLst/>
@@ -3120,48 +3207,6 @@
           <a:lstStyle/>
           <a:p>
             <a:pPr algn="l">
-              <a:lnSpc>
-                <a:spcPts val="8700"/>
-              </a:lnSpc>
-            </a:pPr>
-            <a:r>
-              <a:rPr sz="6000" b="1">
-                <a:solidFill>
-                  <a:srgbClr val="946F3E">
-                    <a:alpha val="95000"/>
-                  </a:srgbClr>
-                </a:solidFill>
-                <a:latin typeface="맑은 고딕"/>
-                <a:ea typeface="맑은 고딕"/>
-              </a:rPr>
-              <a:t>백</a:t>
-            </a:r>
-          </a:p>
-        </p:txBody>
-      </p:sp>
-      <p:sp>
-        <p:nvSpPr>
-          <p:cNvPr id="3" name="텍스트"/>
-          <p:cNvSpPr txBox="1"/>
-          <p:nvPr/>
-        </p:nvSpPr>
-        <p:spPr>
-          <a:xfrm>
-            <a:off x="1692000" y="266400"/>
-            <a:ext cx="1296000" cy="123826"/>
-          </a:xfrm>
-          <a:prstGeom prst="rect">
-            <a:avLst/>
-          </a:prstGeom>
-          <a:noFill/>
-        </p:spPr>
-        <p:txBody>
-          <a:bodyPr wrap="square" lIns="0" rIns="0" tIns="0" bIns="0" anchor="t">
-            <a:spAutoFit/>
-          </a:bodyPr>
-          <a:lstStyle/>
-          <a:p>
-            <a:pPr algn="r">
               <a:lnSpc>
                 <a:spcPts val="942"/>
               </a:lnSpc>
@@ -3179,15 +3224,36 @@
           </a:p>
         </p:txBody>
       </p:sp>
-      <p:sp>
-        <p:nvSpPr>
-          <p:cNvPr id="4" name="텍스트"/>
+      <p:cxnSp>
+        <p:nvCxnSpPr>
+          <p:cNvPr id="6" name="Connector 5"/>
+          <p:cNvCxnSpPr/>
+          <p:nvPr/>
+        </p:nvCxnSpPr>
+        <p:spPr>
+          <a:xfrm>
+            <a:off x="252000" y="633600"/>
+            <a:ext cx="2736000" cy="0"/>
+          </a:xfrm>
+          <a:prstGeom prst="line">
+            <a:avLst/>
+          </a:prstGeom>
+          <a:ln w="3600">
+            <a:solidFill>
+              <a:srgbClr val="D2C9BF"/>
+            </a:solidFill>
+          </a:ln>
+        </p:spPr>
+      </p:cxnSp>
+      <p:sp>
+        <p:nvSpPr>
+          <p:cNvPr id="7" name="텍스트"/>
           <p:cNvSpPr txBox="1"/>
           <p:nvPr/>
         </p:nvSpPr>
         <p:spPr>
           <a:xfrm>
-            <a:off x="252000" y="1080000"/>
+            <a:off x="252000" y="1008000"/>
             <a:ext cx="2520000" cy="201600"/>
           </a:xfrm>
           <a:prstGeom prst="rect">
@@ -3221,13 +3287,13 @@
       </p:sp>
       <p:sp>
         <p:nvSpPr>
-          <p:cNvPr id="5" name="텍스트"/>
+          <p:cNvPr id="8" name="텍스트"/>
           <p:cNvSpPr txBox="1"/>
           <p:nvPr/>
         </p:nvSpPr>
         <p:spPr>
           <a:xfrm>
-            <a:off x="252000" y="1288800"/>
+            <a:off x="252000" y="1231200"/>
             <a:ext cx="2520000" cy="121921"/>
           </a:xfrm>
           <a:prstGeom prst="rect">
@@ -3261,7 +3327,7 @@
       </p:sp>
       <p:cxnSp>
         <p:nvCxnSpPr>
-          <p:cNvPr id="6" name="Connector 5"/>
+          <p:cNvPr id="9" name="Connector 8"/>
           <p:cNvCxnSpPr/>
           <p:nvPr/>
         </p:nvCxnSpPr>
@@ -3282,7 +3348,7 @@
       </p:cxnSp>
       <p:sp>
         <p:nvSpPr>
-          <p:cNvPr id="7" name="텍스트"/>
+          <p:cNvPr id="10" name="텍스트"/>
           <p:cNvSpPr txBox="1"/>
           <p:nvPr/>
         </p:nvSpPr>
